--- a/Canteen_DBMS_Project/Canteen_DBMS_Project/presentation/Canteen_DBMS_Presentation_8_slides.pptx
+++ b/Canteen_DBMS_Project/Canteen_DBMS_Project/presentation/Canteen_DBMS_Presentation_8_slides.pptx
@@ -2202,8 +2202,8 @@
         </p:nvSpPr>
         <p:spPr>
           <a:xfrm>
-            <a:off x="457200" y="2560320"/>
-            <a:ext cx="4023360" cy="2103120"/>
+            <a:off x="393616" y="2560320"/>
+            <a:ext cx="4086944" cy="2103120"/>
           </a:xfrm>
           <a:prstGeom prst="rect">
             <a:avLst/>
@@ -2223,17 +2223,19 @@
               <a:buChar char="•"/>
             </a:pPr>
             <a:r>
-              <a:rPr lang="en-US" sz="1400" dirty="0">
-                <a:solidFill>
-                  <a:srgbClr val="1B2A22"/>
-                </a:solidFill>
-                <a:latin typeface="Calibri" pitchFamily="34" charset="0"/>
-                <a:ea typeface="Calibri" pitchFamily="34" charset="-122"/>
-                <a:cs typeface="Calibri" pitchFamily="34" charset="-120"/>
-              </a:rPr>
-              <a:t>ER design mapped to a 3NF relational schema</a:t>
-            </a:r>
-            <a:endParaRPr lang="en-US" sz="1400" dirty="0"/>
+              <a:rPr lang="en-IN" sz="1400" dirty="0"/>
+              <a:t>Design the ER model for the canteen system</a:t>
+            </a:r>
+          </a:p>
+          <a:p>
+            <a:pPr marL="285750" lvl="0" indent="-285750">
+              <a:buFont typeface="Arial" panose="020B0604020202020204" pitchFamily="34" charset="0"/>
+              <a:buChar char="•"/>
+            </a:pPr>
+            <a:r>
+              <a:rPr lang="en-IN" sz="1400" dirty="0"/>
+              <a:t>Convert the ER model into a 3NF relational database.</a:t>
+            </a:r>
           </a:p>
           <a:p>
             <a:pPr marL="342900" indent="-342900">
@@ -2244,80 +2246,39 @@
               <a:buChar char="•"/>
             </a:pPr>
             <a:r>
-              <a:rPr lang="en-US" sz="1400" dirty="0">
-                <a:solidFill>
-                  <a:srgbClr val="1B2A22"/>
-                </a:solidFill>
-                <a:latin typeface="Calibri" pitchFamily="34" charset="0"/>
-                <a:ea typeface="Calibri" pitchFamily="34" charset="-122"/>
-                <a:cs typeface="Calibri" pitchFamily="34" charset="-120"/>
-              </a:rPr>
-              <a:t>Integrity with PK, FK, UNIQUE, CHECK, ENUM</a:t>
-            </a:r>
-            <a:endParaRPr lang="en-US" sz="1400" dirty="0"/>
-          </a:p>
-          <a:p>
-            <a:pPr marL="342900" indent="-342900">
-              <a:spcAft>
-                <a:spcPts val="400"/>
-              </a:spcAft>
-              <a:buSzPct val="100000"/>
+              <a:rPr lang="en-IN" sz="1400" dirty="0"/>
+              <a:t>Maintain data integrity and consistency.</a:t>
+            </a:r>
+          </a:p>
+          <a:p>
+            <a:pPr marL="285750" lvl="0" indent="-285750">
+              <a:buFont typeface="Arial" panose="020B0604020202020204" pitchFamily="34" charset="0"/>
               <a:buChar char="•"/>
             </a:pPr>
             <a:r>
-              <a:rPr lang="en-US" sz="1400" dirty="0">
-                <a:solidFill>
-                  <a:srgbClr val="1B2A22"/>
-                </a:solidFill>
-                <a:latin typeface="Calibri" pitchFamily="34" charset="0"/>
-                <a:ea typeface="Calibri" pitchFamily="34" charset="-122"/>
-                <a:cs typeface="Calibri" pitchFamily="34" charset="-120"/>
-              </a:rPr>
-              <a:t>Every order is one ACID transaction</a:t>
-            </a:r>
-            <a:endParaRPr lang="en-US" sz="1400" dirty="0"/>
-          </a:p>
-          <a:p>
-            <a:pPr marL="342900" indent="-342900">
-              <a:spcAft>
-                <a:spcPts val="400"/>
-              </a:spcAft>
-              <a:buSzPct val="100000"/>
+              <a:rPr lang="en-IN" sz="1400" dirty="0"/>
+              <a:t>Manage orders, billing, payments, and inventory.</a:t>
+            </a:r>
+          </a:p>
+          <a:p>
+            <a:pPr marL="285750" indent="-285750">
+              <a:buFont typeface="Arial" panose="020B0604020202020204" pitchFamily="34" charset="0"/>
               <a:buChar char="•"/>
             </a:pPr>
             <a:r>
-              <a:rPr lang="en-US" sz="1400" dirty="0">
-                <a:solidFill>
-                  <a:srgbClr val="1B2A22"/>
-                </a:solidFill>
-                <a:latin typeface="Calibri" pitchFamily="34" charset="0"/>
-                <a:ea typeface="Calibri" pitchFamily="34" charset="-122"/>
-                <a:cs typeface="Calibri" pitchFamily="34" charset="-120"/>
-              </a:rPr>
-              <a:t>Order → bill → payment trail, recipe-based stock</a:t>
-            </a:r>
-            <a:endParaRPr lang="en-US" sz="1400" dirty="0"/>
-          </a:p>
-          <a:p>
-            <a:pPr marL="342900" indent="-342900">
-              <a:spcAft>
-                <a:spcPts val="400"/>
-              </a:spcAft>
-              <a:buSzPct val="100000"/>
+              <a:rPr lang="en-IN" sz="1400" dirty="0"/>
+              <a:t>Provide a web interface for students, staff, and admins.</a:t>
+            </a:r>
+          </a:p>
+          <a:p>
+            <a:pPr marL="285750" lvl="0" indent="-285750">
+              <a:buFont typeface="Arial" panose="020B0604020202020204" pitchFamily="34" charset="0"/>
               <a:buChar char="•"/>
             </a:pPr>
             <a:r>
-              <a:rPr lang="en-US" sz="1400" dirty="0">
-                <a:solidFill>
-                  <a:srgbClr val="1B2A22"/>
-                </a:solidFill>
-                <a:latin typeface="Calibri" pitchFamily="34" charset="0"/>
-                <a:ea typeface="Calibri" pitchFamily="34" charset="-122"/>
-                <a:cs typeface="Calibri" pitchFamily="34" charset="-120"/>
-              </a:rPr>
-              <a:t>Web app with role-based access and SQL reports</a:t>
-            </a:r>
-            <a:endParaRPr lang="en-US" sz="1400" dirty="0"/>
+              <a:rPr lang="en-IN" sz="1400" dirty="0"/>
+              <a:t>Generate SQL-based reports for canteen operations. </a:t>
+            </a:r>
           </a:p>
         </p:txBody>
       </p:sp>
